--- a/documentation/presentation/rubbish-solutions-group2.pptx
+++ b/documentation/presentation/rubbish-solutions-group2.pptx
@@ -6,6 +6,7 @@
   </p:sldMasterIdLst>
   <p:sldIdLst>
     <p:sldId id="256" r:id="rId2"/>
+    <p:sldId id="257" r:id="rId3"/>
   </p:sldIdLst>
   <p:sldSz cx="12192000" cy="6858000"/>
   <p:notesSz cx="6858000" cy="9144000"/>
@@ -104,7 +105,49 @@
       </a:defRPr>
     </a:lvl9pPr>
   </p:defaultTextStyle>
+  <p:extLst>
+    <p:ext uri="{EFAFB233-063F-42B5-8137-9DF3F51BA10A}">
+      <p15:sldGuideLst xmlns:p15="http://schemas.microsoft.com/office/powerpoint/2012/main"/>
+    </p:ext>
+  </p:extLst>
 </p:presentation>
+</file>
+
+<file path=ppt/changesInfos/changesInfo1.xml><?xml version="1.0" encoding="utf-8"?>
+<pc:chgInfo xmlns:a="http://schemas.openxmlformats.org/drawingml/2006/main" xmlns:r="http://schemas.openxmlformats.org/officeDocument/2006/relationships" xmlns:ac="http://schemas.microsoft.com/office/drawing/2013/main/command" xmlns:pc="http://schemas.microsoft.com/office/powerpoint/2013/main/command">
+  <pc:docChgLst>
+    <pc:chgData name="Stanton-Andersson, Torin" userId="542e60e1-2a4d-472b-95a3-1b750c9eca6a" providerId="ADAL" clId="{F0AE786B-BEBA-49C2-A1BC-9942907BD756}"/>
+    <pc:docChg chg="custSel addSld modSld">
+      <pc:chgData name="Stanton-Andersson, Torin" userId="542e60e1-2a4d-472b-95a3-1b750c9eca6a" providerId="ADAL" clId="{F0AE786B-BEBA-49C2-A1BC-9942907BD756}" dt="2026-03-03T12:22:00.255" v="74" actId="20577"/>
+      <pc:docMkLst>
+        <pc:docMk/>
+      </pc:docMkLst>
+      <pc:sldChg chg="modSp new mod">
+        <pc:chgData name="Stanton-Andersson, Torin" userId="542e60e1-2a4d-472b-95a3-1b750c9eca6a" providerId="ADAL" clId="{F0AE786B-BEBA-49C2-A1BC-9942907BD756}" dt="2026-03-03T12:22:00.255" v="74" actId="20577"/>
+        <pc:sldMkLst>
+          <pc:docMk/>
+          <pc:sldMk cId="2208228253" sldId="257"/>
+        </pc:sldMkLst>
+        <pc:spChg chg="mod">
+          <ac:chgData name="Stanton-Andersson, Torin" userId="542e60e1-2a4d-472b-95a3-1b750c9eca6a" providerId="ADAL" clId="{F0AE786B-BEBA-49C2-A1BC-9942907BD756}" dt="2026-03-03T12:21:41.820" v="29" actId="20577"/>
+          <ac:spMkLst>
+            <pc:docMk/>
+            <pc:sldMk cId="2208228253" sldId="257"/>
+            <ac:spMk id="2" creationId="{A065B200-DA66-8382-F0F6-9E75C50B6E3A}"/>
+          </ac:spMkLst>
+        </pc:spChg>
+        <pc:spChg chg="mod">
+          <ac:chgData name="Stanton-Andersson, Torin" userId="542e60e1-2a4d-472b-95a3-1b750c9eca6a" providerId="ADAL" clId="{F0AE786B-BEBA-49C2-A1BC-9942907BD756}" dt="2026-03-03T12:22:00.255" v="74" actId="20577"/>
+          <ac:spMkLst>
+            <pc:docMk/>
+            <pc:sldMk cId="2208228253" sldId="257"/>
+            <ac:spMk id="3" creationId="{6734CD12-6B7E-5356-03F2-9CB1E3C44F1D}"/>
+          </ac:spMkLst>
+        </pc:spChg>
+      </pc:sldChg>
+    </pc:docChg>
+  </pc:docChgLst>
+</pc:chgInfo>
 </file>
 
 <file path=ppt/slideLayouts/slideLayout1.xml><?xml version="1.0" encoding="utf-8"?>
@@ -3396,6 +3439,103 @@
     <p:extLst>
       <p:ext uri="{BB962C8B-B14F-4D97-AF65-F5344CB8AC3E}">
         <p14:creationId xmlns:p14="http://schemas.microsoft.com/office/powerpoint/2010/main" val="3204687487"/>
+      </p:ext>
+    </p:extLst>
+  </p:cSld>
+  <p:clrMapOvr>
+    <a:masterClrMapping/>
+  </p:clrMapOvr>
+</p:sld>
+</file>
+
+<file path=ppt/slides/slide2.xml><?xml version="1.0" encoding="utf-8"?>
+<p:sld xmlns:a="http://schemas.openxmlformats.org/drawingml/2006/main" xmlns:r="http://schemas.openxmlformats.org/officeDocument/2006/relationships" xmlns:p="http://schemas.openxmlformats.org/presentationml/2006/main">
+  <p:cSld>
+    <p:spTree>
+      <p:nvGrpSpPr>
+        <p:cNvPr id="1" name=""/>
+        <p:cNvGrpSpPr/>
+        <p:nvPr/>
+      </p:nvGrpSpPr>
+      <p:grpSpPr>
+        <a:xfrm>
+          <a:off x="0" y="0"/>
+          <a:ext cx="0" cy="0"/>
+          <a:chOff x="0" y="0"/>
+          <a:chExt cx="0" cy="0"/>
+        </a:xfrm>
+      </p:grpSpPr>
+      <p:sp>
+        <p:nvSpPr>
+          <p:cNvPr id="2" name="Title 1">
+            <a:extLst>
+              <a:ext uri="{FF2B5EF4-FFF2-40B4-BE49-F238E27FC236}">
+                <a16:creationId xmlns:a16="http://schemas.microsoft.com/office/drawing/2014/main" id="{A065B200-DA66-8382-F0F6-9E75C50B6E3A}"/>
+              </a:ext>
+            </a:extLst>
+          </p:cNvPr>
+          <p:cNvSpPr>
+            <a:spLocks noGrp="1"/>
+          </p:cNvSpPr>
+          <p:nvPr>
+            <p:ph type="title"/>
+          </p:nvPr>
+        </p:nvSpPr>
+        <p:spPr/>
+        <p:txBody>
+          <a:bodyPr/>
+          <a:lstStyle/>
+          <a:p>
+            <a:r>
+              <a:rPr lang="en-GB" dirty="0"/>
+              <a:t>Intro</a:t>
+            </a:r>
+          </a:p>
+        </p:txBody>
+      </p:sp>
+      <p:sp>
+        <p:nvSpPr>
+          <p:cNvPr id="3" name="Content Placeholder 2">
+            <a:extLst>
+              <a:ext uri="{FF2B5EF4-FFF2-40B4-BE49-F238E27FC236}">
+                <a16:creationId xmlns:a16="http://schemas.microsoft.com/office/drawing/2014/main" id="{6734CD12-6B7E-5356-03F2-9CB1E3C44F1D}"/>
+              </a:ext>
+            </a:extLst>
+          </p:cNvPr>
+          <p:cNvSpPr>
+            <a:spLocks noGrp="1"/>
+          </p:cNvSpPr>
+          <p:nvPr>
+            <p:ph idx="1"/>
+          </p:nvPr>
+        </p:nvSpPr>
+        <p:spPr/>
+        <p:txBody>
+          <a:bodyPr/>
+          <a:lstStyle/>
+          <a:p>
+            <a:r>
+              <a:rPr lang="en-GB" dirty="0"/>
+              <a:t>Lol </a:t>
+            </a:r>
+            <a:r>
+              <a:rPr lang="en-GB" dirty="0" err="1"/>
+              <a:t>spek</a:t>
+            </a:r>
+            <a:endParaRPr lang="en-GB" dirty="0"/>
+          </a:p>
+          <a:p>
+            <a:r>
+              <a:rPr lang="en-GB"/>
+              <a:t>A lot</a:t>
+            </a:r>
+          </a:p>
+        </p:txBody>
+      </p:sp>
+    </p:spTree>
+    <p:extLst>
+      <p:ext uri="{BB962C8B-B14F-4D97-AF65-F5344CB8AC3E}">
+        <p14:creationId xmlns:p14="http://schemas.microsoft.com/office/powerpoint/2010/main" val="2208228253"/>
       </p:ext>
     </p:extLst>
   </p:cSld>
